--- a/class/cloud_infra_mgmt/14주차_통합실습2/01_강의자료/2차시_ApacheBench부하테스트.pptx
+++ b/class/cloud_infra_mgmt/14주차_통합실습2/01_강의자료/2차시_ApacheBench부하테스트.pptx
@@ -5250,7 +5250,7 @@
           <a:p>
             <a:pPr>
               <a:lnSpc>
-                <a:spcPct val="115000"/>
+                <a:spcPct val="149500"/>
               </a:lnSpc>
             </a:pPr>
             <a:r>
@@ -5275,7 +5275,7 @@
           <a:p>
             <a:pPr>
               <a:lnSpc>
-                <a:spcPct val="115000"/>
+                <a:spcPct val="149500"/>
               </a:lnSpc>
             </a:pPr>
             <a:r>
@@ -5300,7 +5300,7 @@
           <a:p>
             <a:pPr>
               <a:lnSpc>
-                <a:spcPct val="115000"/>
+                <a:spcPct val="149500"/>
               </a:lnSpc>
             </a:pPr>
             <a:r>
@@ -5691,7 +5691,7 @@
           <a:p>
             <a:pPr>
               <a:lnSpc>
-                <a:spcPct val="115000"/>
+                <a:spcPct val="149500"/>
               </a:lnSpc>
             </a:pPr>
             <a:r>
@@ -5716,7 +5716,7 @@
           <a:p>
             <a:pPr>
               <a:lnSpc>
-                <a:spcPct val="115000"/>
+                <a:spcPct val="149500"/>
               </a:lnSpc>
             </a:pPr>
             <a:r>
@@ -5741,7 +5741,7 @@
           <a:p>
             <a:pPr>
               <a:lnSpc>
-                <a:spcPct val="115000"/>
+                <a:spcPct val="149500"/>
               </a:lnSpc>
             </a:pPr>
             <a:r>
@@ -6990,16 +6990,60 @@
       </p:sp>
       <p:sp>
         <p:nvSpPr>
-          <p:cNvPr id="7" name="Isosceles Triangle 6"/>
+          <p:cNvPr id="7" name="Rectangle 6"/>
           <p:cNvSpPr/>
           <p:nvPr/>
         </p:nvSpPr>
         <p:spPr>
-          <a:xfrm rot="5400000">
-            <a:off x="4423409" y="1673352"/>
-            <a:ext cx="146304" cy="146304"/>
-          </a:xfrm>
-          <a:prstGeom prst="triangle">
+          <a:xfrm>
+            <a:off x="6359651" y="1730959"/>
+            <a:ext cx="2665476" cy="31089"/>
+          </a:xfrm>
+          <a:prstGeom prst="rect">
+            <a:avLst/>
+          </a:prstGeom>
+          <a:solidFill>
+            <a:srgbClr val="14B8A6"/>
+          </a:solidFill>
+          <a:ln>
+            <a:noFill/>
+          </a:ln>
+          <a:effectLst/>
+        </p:spPr>
+        <p:style>
+          <a:lnRef idx="1">
+            <a:schemeClr val="accent1"/>
+          </a:lnRef>
+          <a:fillRef idx="3">
+            <a:schemeClr val="accent1"/>
+          </a:fillRef>
+          <a:effectRef idx="2">
+            <a:schemeClr val="accent1"/>
+          </a:effectRef>
+          <a:fontRef idx="minor">
+            <a:schemeClr val="lt1"/>
+          </a:fontRef>
+        </p:style>
+        <p:txBody>
+          <a:bodyPr rtlCol="0" anchor="ctr"/>
+          <a:lstStyle/>
+          <a:p>
+            <a:pPr algn="ctr"/>
+          </a:p>
+        </p:txBody>
+      </p:sp>
+      <p:sp>
+        <p:nvSpPr>
+          <p:cNvPr id="8" name="Oval 7"/>
+          <p:cNvSpPr/>
+          <p:nvPr/>
+        </p:nvSpPr>
+        <p:spPr>
+          <a:xfrm>
+            <a:off x="2633472" y="1481328"/>
+            <a:ext cx="530352" cy="530352"/>
+          </a:xfrm>
+          <a:prstGeom prst="ellipse">
             <a:avLst/>
           </a:prstGeom>
           <a:solidFill>
@@ -7034,139 +7078,7 @@
       </p:sp>
       <p:sp>
         <p:nvSpPr>
-          <p:cNvPr id="8" name="Rectangle 7"/>
-          <p:cNvSpPr/>
-          <p:nvPr/>
-        </p:nvSpPr>
-        <p:spPr>
-          <a:xfrm>
-            <a:off x="6359651" y="1730959"/>
-            <a:ext cx="2665476" cy="31089"/>
-          </a:xfrm>
-          <a:prstGeom prst="rect">
-            <a:avLst/>
-          </a:prstGeom>
-          <a:solidFill>
-            <a:srgbClr val="14B8A6"/>
-          </a:solidFill>
-          <a:ln>
-            <a:noFill/>
-          </a:ln>
-          <a:effectLst/>
-        </p:spPr>
-        <p:style>
-          <a:lnRef idx="1">
-            <a:schemeClr val="accent1"/>
-          </a:lnRef>
-          <a:fillRef idx="3">
-            <a:schemeClr val="accent1"/>
-          </a:fillRef>
-          <a:effectRef idx="2">
-            <a:schemeClr val="accent1"/>
-          </a:effectRef>
-          <a:fontRef idx="minor">
-            <a:schemeClr val="lt1"/>
-          </a:fontRef>
-        </p:style>
-        <p:txBody>
-          <a:bodyPr rtlCol="0" anchor="ctr"/>
-          <a:lstStyle/>
-          <a:p>
-            <a:pPr algn="ctr"/>
-          </a:p>
-        </p:txBody>
-      </p:sp>
-      <p:sp>
-        <p:nvSpPr>
-          <p:cNvPr id="9" name="Isosceles Triangle 8"/>
-          <p:cNvSpPr/>
-          <p:nvPr/>
-        </p:nvSpPr>
-        <p:spPr>
-          <a:xfrm rot="5400000">
-            <a:off x="7619238" y="1673352"/>
-            <a:ext cx="146304" cy="146304"/>
-          </a:xfrm>
-          <a:prstGeom prst="triangle">
-            <a:avLst/>
-          </a:prstGeom>
-          <a:solidFill>
-            <a:srgbClr val="0D9488"/>
-          </a:solidFill>
-          <a:ln>
-            <a:noFill/>
-          </a:ln>
-          <a:effectLst/>
-        </p:spPr>
-        <p:style>
-          <a:lnRef idx="1">
-            <a:schemeClr val="accent1"/>
-          </a:lnRef>
-          <a:fillRef idx="3">
-            <a:schemeClr val="accent1"/>
-          </a:fillRef>
-          <a:effectRef idx="2">
-            <a:schemeClr val="accent1"/>
-          </a:effectRef>
-          <a:fontRef idx="minor">
-            <a:schemeClr val="lt1"/>
-          </a:fontRef>
-        </p:style>
-        <p:txBody>
-          <a:bodyPr rtlCol="0" anchor="ctr"/>
-          <a:lstStyle/>
-          <a:p>
-            <a:pPr algn="ctr"/>
-          </a:p>
-        </p:txBody>
-      </p:sp>
-      <p:sp>
-        <p:nvSpPr>
-          <p:cNvPr id="10" name="Oval 9"/>
-          <p:cNvSpPr/>
-          <p:nvPr/>
-        </p:nvSpPr>
-        <p:spPr>
-          <a:xfrm>
-            <a:off x="2633472" y="1481328"/>
-            <a:ext cx="530352" cy="530352"/>
-          </a:xfrm>
-          <a:prstGeom prst="ellipse">
-            <a:avLst/>
-          </a:prstGeom>
-          <a:solidFill>
-            <a:srgbClr val="0D9488"/>
-          </a:solidFill>
-          <a:ln>
-            <a:noFill/>
-          </a:ln>
-          <a:effectLst/>
-        </p:spPr>
-        <p:style>
-          <a:lnRef idx="1">
-            <a:schemeClr val="accent1"/>
-          </a:lnRef>
-          <a:fillRef idx="3">
-            <a:schemeClr val="accent1"/>
-          </a:fillRef>
-          <a:effectRef idx="2">
-            <a:schemeClr val="accent1"/>
-          </a:effectRef>
-          <a:fontRef idx="minor">
-            <a:schemeClr val="lt1"/>
-          </a:fontRef>
-        </p:style>
-        <p:txBody>
-          <a:bodyPr rtlCol="0" anchor="ctr"/>
-          <a:lstStyle/>
-          <a:p>
-            <a:pPr algn="ctr"/>
-          </a:p>
-        </p:txBody>
-      </p:sp>
-      <p:sp>
-        <p:nvSpPr>
-          <p:cNvPr id="11" name="TextBox 10"/>
+          <p:cNvPr id="9" name="TextBox 8"/>
           <p:cNvSpPr txBox="1"/>
           <p:nvPr/>
         </p:nvSpPr>
@@ -7201,7 +7113,7 @@
       </p:sp>
       <p:sp>
         <p:nvSpPr>
-          <p:cNvPr id="12" name="Rounded Rectangle 11"/>
+          <p:cNvPr id="10" name="Rounded Rectangle 9"/>
           <p:cNvSpPr/>
           <p:nvPr/>
         </p:nvSpPr>
@@ -7249,7 +7161,7 @@
       </p:sp>
       <p:sp>
         <p:nvSpPr>
-          <p:cNvPr id="13" name="TextBox 12"/>
+          <p:cNvPr id="11" name="TextBox 10"/>
           <p:cNvSpPr txBox="1"/>
           <p:nvPr/>
         </p:nvSpPr>
@@ -7284,7 +7196,7 @@
       </p:sp>
       <p:sp>
         <p:nvSpPr>
-          <p:cNvPr id="14" name="TextBox 13"/>
+          <p:cNvPr id="12" name="TextBox 11"/>
           <p:cNvSpPr txBox="1"/>
           <p:nvPr/>
         </p:nvSpPr>
@@ -7323,7 +7235,7 @@
       </p:sp>
       <p:sp>
         <p:nvSpPr>
-          <p:cNvPr id="15" name="Oval 14"/>
+          <p:cNvPr id="13" name="Oval 12"/>
           <p:cNvSpPr/>
           <p:nvPr/>
         </p:nvSpPr>
@@ -7367,7 +7279,7 @@
       </p:sp>
       <p:sp>
         <p:nvSpPr>
-          <p:cNvPr id="16" name="TextBox 15"/>
+          <p:cNvPr id="14" name="TextBox 13"/>
           <p:cNvSpPr txBox="1"/>
           <p:nvPr/>
         </p:nvSpPr>
@@ -7402,7 +7314,7 @@
       </p:sp>
       <p:sp>
         <p:nvSpPr>
-          <p:cNvPr id="17" name="Rounded Rectangle 16"/>
+          <p:cNvPr id="15" name="Rounded Rectangle 14"/>
           <p:cNvSpPr/>
           <p:nvPr/>
         </p:nvSpPr>
@@ -7450,7 +7362,7 @@
       </p:sp>
       <p:sp>
         <p:nvSpPr>
-          <p:cNvPr id="18" name="TextBox 17"/>
+          <p:cNvPr id="16" name="TextBox 15"/>
           <p:cNvSpPr txBox="1"/>
           <p:nvPr/>
         </p:nvSpPr>
@@ -7485,7 +7397,7 @@
       </p:sp>
       <p:sp>
         <p:nvSpPr>
-          <p:cNvPr id="19" name="TextBox 18"/>
+          <p:cNvPr id="17" name="TextBox 16"/>
           <p:cNvSpPr txBox="1"/>
           <p:nvPr/>
         </p:nvSpPr>
@@ -7524,7 +7436,7 @@
       </p:sp>
       <p:sp>
         <p:nvSpPr>
-          <p:cNvPr id="20" name="Oval 19"/>
+          <p:cNvPr id="18" name="Oval 17"/>
           <p:cNvSpPr/>
           <p:nvPr/>
         </p:nvSpPr>
@@ -7568,7 +7480,7 @@
       </p:sp>
       <p:sp>
         <p:nvSpPr>
-          <p:cNvPr id="21" name="TextBox 20"/>
+          <p:cNvPr id="19" name="TextBox 18"/>
           <p:cNvSpPr txBox="1"/>
           <p:nvPr/>
         </p:nvSpPr>
@@ -7603,7 +7515,7 @@
       </p:sp>
       <p:sp>
         <p:nvSpPr>
-          <p:cNvPr id="22" name="Rounded Rectangle 21"/>
+          <p:cNvPr id="20" name="Rounded Rectangle 19"/>
           <p:cNvSpPr/>
           <p:nvPr/>
         </p:nvSpPr>
@@ -7651,7 +7563,7 @@
       </p:sp>
       <p:sp>
         <p:nvSpPr>
-          <p:cNvPr id="23" name="TextBox 22"/>
+          <p:cNvPr id="21" name="TextBox 20"/>
           <p:cNvSpPr txBox="1"/>
           <p:nvPr/>
         </p:nvSpPr>
@@ -7686,7 +7598,7 @@
       </p:sp>
       <p:sp>
         <p:nvSpPr>
-          <p:cNvPr id="24" name="TextBox 23"/>
+          <p:cNvPr id="22" name="TextBox 21"/>
           <p:cNvSpPr txBox="1"/>
           <p:nvPr/>
         </p:nvSpPr>
@@ -7725,7 +7637,7 @@
       </p:sp>
       <p:sp>
         <p:nvSpPr>
-          <p:cNvPr id="25" name="TextBox 24"/>
+          <p:cNvPr id="23" name="TextBox 22"/>
           <p:cNvSpPr txBox="1"/>
           <p:nvPr/>
         </p:nvSpPr>
@@ -7760,7 +7672,7 @@
       </p:sp>
       <p:sp>
         <p:nvSpPr>
-          <p:cNvPr id="26" name="TextBox 25"/>
+          <p:cNvPr id="24" name="TextBox 23"/>
           <p:cNvSpPr txBox="1"/>
           <p:nvPr/>
         </p:nvSpPr>
@@ -7795,7 +7707,7 @@
       </p:sp>
       <p:sp>
         <p:nvSpPr>
-          <p:cNvPr id="27" name="Rectangle 26"/>
+          <p:cNvPr id="25" name="Rectangle 24"/>
           <p:cNvSpPr/>
           <p:nvPr/>
         </p:nvSpPr>
@@ -8319,7 +8231,7 @@
           <a:p>
             <a:pPr>
               <a:lnSpc>
-                <a:spcPct val="115000"/>
+                <a:spcPct val="149500"/>
               </a:lnSpc>
             </a:pPr>
             <a:r>
@@ -8344,7 +8256,7 @@
           <a:p>
             <a:pPr>
               <a:lnSpc>
-                <a:spcPct val="115000"/>
+                <a:spcPct val="149500"/>
               </a:lnSpc>
             </a:pPr>
             <a:r>
@@ -8369,7 +8281,7 @@
           <a:p>
             <a:pPr>
               <a:lnSpc>
-                <a:spcPct val="115000"/>
+                <a:spcPct val="149500"/>
               </a:lnSpc>
             </a:pPr>
             <a:r>
@@ -8394,7 +8306,7 @@
           <a:p>
             <a:pPr>
               <a:lnSpc>
-                <a:spcPct val="115000"/>
+                <a:spcPct val="149500"/>
               </a:lnSpc>
             </a:pPr>
             <a:r>
@@ -9014,7 +8926,7 @@
           <a:p>
             <a:pPr>
               <a:lnSpc>
-                <a:spcPct val="115000"/>
+                <a:spcPct val="149500"/>
               </a:lnSpc>
             </a:pPr>
             <a:r>
@@ -9039,7 +8951,7 @@
           <a:p>
             <a:pPr>
               <a:lnSpc>
-                <a:spcPct val="115000"/>
+                <a:spcPct val="149500"/>
               </a:lnSpc>
             </a:pPr>
             <a:r>
@@ -9064,7 +8976,7 @@
           <a:p>
             <a:pPr>
               <a:lnSpc>
-                <a:spcPct val="115000"/>
+                <a:spcPct val="149500"/>
               </a:lnSpc>
             </a:pPr>
             <a:r>
@@ -9569,7 +9481,7 @@
           <a:p>
             <a:pPr>
               <a:lnSpc>
-                <a:spcPct val="115000"/>
+                <a:spcPct val="149500"/>
               </a:lnSpc>
             </a:pPr>
             <a:r>
@@ -9594,7 +9506,7 @@
           <a:p>
             <a:pPr>
               <a:lnSpc>
-                <a:spcPct val="115000"/>
+                <a:spcPct val="149500"/>
               </a:lnSpc>
             </a:pPr>
             <a:r>
@@ -9619,7 +9531,7 @@
           <a:p>
             <a:pPr>
               <a:lnSpc>
-                <a:spcPct val="115000"/>
+                <a:spcPct val="149500"/>
               </a:lnSpc>
             </a:pPr>
             <a:r>
@@ -10010,7 +9922,7 @@
           <a:p>
             <a:pPr>
               <a:lnSpc>
-                <a:spcPct val="115000"/>
+                <a:spcPct val="149500"/>
               </a:lnSpc>
             </a:pPr>
             <a:r>
@@ -10035,7 +9947,7 @@
           <a:p>
             <a:pPr>
               <a:lnSpc>
-                <a:spcPct val="115000"/>
+                <a:spcPct val="149500"/>
               </a:lnSpc>
             </a:pPr>
             <a:r>
@@ -10060,7 +9972,7 @@
           <a:p>
             <a:pPr>
               <a:lnSpc>
-                <a:spcPct val="115000"/>
+                <a:spcPct val="149500"/>
               </a:lnSpc>
             </a:pPr>
             <a:r>

--- a/class/cloud_infra_mgmt/14주차_통합실습2/01_강의자료/2차시_ApacheBench부하테스트.pptx
+++ b/class/cloud_infra_mgmt/14주차_통합실습2/01_강의자료/2차시_ApacheBench부하테스트.pptx
@@ -4886,6 +4886,8 @@
                   <a:srgbClr val="14B8A6"/>
                 </a:solidFill>
                 <a:latin typeface="맑은 고딕"/>
+                <a:ea typeface="맑은 고딕"/>
+                <a:cs typeface="맑은 고딕"/>
               </a:rPr>
               <a:t>클라우드인프라관리  ·  14주차 2차시 [VM 전용]</a:t>
             </a:r>
@@ -4921,6 +4923,8 @@
                   <a:srgbClr val="FFFFFF"/>
                 </a:solidFill>
                 <a:latin typeface="맑은 고딕"/>
+                <a:ea typeface="맑은 고딕"/>
+                <a:cs typeface="맑은 고딕"/>
               </a:rPr>
               <a:t>ApacheBench 부하 테스트</a:t>
             </a:r>
@@ -4956,6 +4960,8 @@
                   <a:srgbClr val="C9D3E6"/>
                 </a:solidFill>
                 <a:latin typeface="맑은 고딕"/>
+                <a:ea typeface="맑은 고딕"/>
+                <a:cs typeface="맑은 고딕"/>
               </a:rPr>
               <a:t>실제로 트래픽을 폭주시켜 스케일업을 눈으로 본다</a:t>
             </a:r>
@@ -4991,6 +4997,8 @@
                   <a:srgbClr val="FFFFFF"/>
                 </a:solidFill>
                 <a:latin typeface="맑은 고딕"/>
+                <a:ea typeface="맑은 고딕"/>
+                <a:cs typeface="맑은 고딕"/>
               </a:rPr>
               <a:t>영남이공대학교 김지윤교수</a:t>
             </a:r>
@@ -5150,6 +5158,8 @@
                   <a:srgbClr val="14213D"/>
                 </a:solidFill>
                 <a:latin typeface="맑은 고딕"/>
+                <a:ea typeface="맑은 고딕"/>
+                <a:cs typeface="맑은 고딕"/>
               </a:rPr>
               <a:t>03</a:t>
             </a:r>
@@ -5185,6 +5195,8 @@
                   <a:srgbClr val="14B8A6"/>
                 </a:solidFill>
                 <a:latin typeface="맑은 고딕"/>
+                <a:ea typeface="맑은 고딕"/>
+                <a:cs typeface="맑은 고딕"/>
               </a:rPr>
               <a:t>실습 안내</a:t>
             </a:r>
@@ -5220,6 +5232,8 @@
                   <a:srgbClr val="FFFFFF"/>
                 </a:solidFill>
                 <a:latin typeface="맑은 고딕"/>
+                <a:ea typeface="맑은 고딕"/>
+                <a:cs typeface="맑은 고딕"/>
               </a:rPr>
               <a:t>VM 실습 — 스케일업 관찰</a:t>
             </a:r>
@@ -5259,6 +5273,8 @@
                   <a:srgbClr val="0D9488"/>
                 </a:solidFill>
                 <a:latin typeface="맑은 고딕"/>
+                <a:ea typeface="맑은 고딕"/>
+                <a:cs typeface="맑은 고딕"/>
               </a:rPr>
               <a:t>●  </a:t>
             </a:r>
@@ -5268,6 +5284,8 @@
                   <a:srgbClr val="222733"/>
                 </a:solidFill>
                 <a:latin typeface="맑은 고딕"/>
+                <a:ea typeface="맑은 고딕"/>
+                <a:cs typeface="맑은 고딕"/>
               </a:rPr>
               <a:t>kubectl get hpa -w 화면에서 TARGET(CPU %)이 올라가는 것을 관찰</a:t>
             </a:r>
@@ -5284,6 +5302,8 @@
                   <a:srgbClr val="0D9488"/>
                 </a:solidFill>
                 <a:latin typeface="맑은 고딕"/>
+                <a:ea typeface="맑은 고딕"/>
+                <a:cs typeface="맑은 고딕"/>
               </a:rPr>
               <a:t>●  </a:t>
             </a:r>
@@ -5293,6 +5313,8 @@
                   <a:srgbClr val="222733"/>
                 </a:solidFill>
                 <a:latin typeface="맑은 고딕"/>
+                <a:ea typeface="맑은 고딕"/>
+                <a:cs typeface="맑은 고딕"/>
               </a:rPr>
               <a:t>목표치(50%)를 넘으면 REPLICAS가 1 → 2 → 3처럼 늘어나는 순간을 포착</a:t>
             </a:r>
@@ -5309,6 +5331,8 @@
                   <a:srgbClr val="0D9488"/>
                 </a:solidFill>
                 <a:latin typeface="맑은 고딕"/>
+                <a:ea typeface="맑은 고딕"/>
+                <a:cs typeface="맑은 고딕"/>
               </a:rPr>
               <a:t>●  </a:t>
             </a:r>
@@ -5318,6 +5342,8 @@
                   <a:srgbClr val="222733"/>
                 </a:solidFill>
                 <a:latin typeface="맑은 고딕"/>
+                <a:ea typeface="맑은 고딕"/>
+                <a:cs typeface="맑은 고딕"/>
               </a:rPr>
               <a:t>kubectl get pods -w 화면에서 새 chatbot Pod가 추가로 생성되는 것을 확인</a:t>
             </a:r>
@@ -5353,6 +5379,8 @@
                   <a:srgbClr val="5B6373"/>
                 </a:solidFill>
                 <a:latin typeface="맑은 고딕"/>
+                <a:ea typeface="맑은 고딕"/>
+                <a:cs typeface="맑은 고딕"/>
               </a:rPr>
               <a:t>클라우드인프라관리  ·  14주차 2차시 [VM 전용]</a:t>
             </a:r>
@@ -5388,6 +5416,8 @@
                   <a:srgbClr val="5B6373"/>
                 </a:solidFill>
                 <a:latin typeface="맑은 고딕"/>
+                <a:ea typeface="맑은 고딕"/>
+                <a:cs typeface="맑은 고딕"/>
               </a:rPr>
               <a:t>11 / 13</a:t>
             </a:r>
@@ -5591,6 +5621,8 @@
                   <a:srgbClr val="14213D"/>
                 </a:solidFill>
                 <a:latin typeface="맑은 고딕"/>
+                <a:ea typeface="맑은 고딕"/>
+                <a:cs typeface="맑은 고딕"/>
               </a:rPr>
               <a:t>03</a:t>
             </a:r>
@@ -5626,6 +5658,8 @@
                   <a:srgbClr val="14B8A6"/>
                 </a:solidFill>
                 <a:latin typeface="맑은 고딕"/>
+                <a:ea typeface="맑은 고딕"/>
+                <a:cs typeface="맑은 고딕"/>
               </a:rPr>
               <a:t>실습 안내</a:t>
             </a:r>
@@ -5661,6 +5695,8 @@
                   <a:srgbClr val="FFFFFF"/>
                 </a:solidFill>
                 <a:latin typeface="맑은 고딕"/>
+                <a:ea typeface="맑은 고딕"/>
+                <a:cs typeface="맑은 고딕"/>
               </a:rPr>
               <a:t>결과 정리 및 제출</a:t>
             </a:r>
@@ -5700,6 +5736,8 @@
                   <a:srgbClr val="0D9488"/>
                 </a:solidFill>
                 <a:latin typeface="맑은 고딕"/>
+                <a:ea typeface="맑은 고딕"/>
+                <a:cs typeface="맑은 고딕"/>
               </a:rPr>
               <a:t>●  </a:t>
             </a:r>
@@ -5709,6 +5747,8 @@
                   <a:srgbClr val="222733"/>
                 </a:solidFill>
                 <a:latin typeface="맑은 고딕"/>
+                <a:ea typeface="맑은 고딕"/>
+                <a:cs typeface="맑은 고딕"/>
               </a:rPr>
               <a:t>ab 실행 결과(Requests per second 등 통계) 캡처</a:t>
             </a:r>
@@ -5725,6 +5765,8 @@
                   <a:srgbClr val="0D9488"/>
                 </a:solidFill>
                 <a:latin typeface="맑은 고딕"/>
+                <a:ea typeface="맑은 고딕"/>
+                <a:cs typeface="맑은 고딕"/>
               </a:rPr>
               <a:t>●  </a:t>
             </a:r>
@@ -5734,6 +5776,8 @@
                   <a:srgbClr val="222733"/>
                 </a:solidFill>
                 <a:latin typeface="맑은 고딕"/>
+                <a:ea typeface="맑은 고딕"/>
+                <a:cs typeface="맑은 고딕"/>
               </a:rPr>
               <a:t>kubectl get hpa 에서 REPLICAS가 늘어난 순간의 화면 캡처(예: 1/1 → 3/5)</a:t>
             </a:r>
@@ -5750,6 +5794,8 @@
                   <a:srgbClr val="0D9488"/>
                 </a:solidFill>
                 <a:latin typeface="맑은 고딕"/>
+                <a:ea typeface="맑은 고딕"/>
+                <a:cs typeface="맑은 고딕"/>
               </a:rPr>
               <a:t>●  </a:t>
             </a:r>
@@ -5759,6 +5805,8 @@
                   <a:srgbClr val="222733"/>
                 </a:solidFill>
                 <a:latin typeface="맑은 고딕"/>
+                <a:ea typeface="맑은 고딕"/>
+                <a:cs typeface="맑은 고딕"/>
               </a:rPr>
               <a:t>kubectl get pods 에서 chatbot Pod가 여러 개로 늘어난 화면 캡처</a:t>
             </a:r>
@@ -5794,6 +5842,8 @@
                   <a:srgbClr val="5B6373"/>
                 </a:solidFill>
                 <a:latin typeface="맑은 고딕"/>
+                <a:ea typeface="맑은 고딕"/>
+                <a:cs typeface="맑은 고딕"/>
               </a:rPr>
               <a:t>클라우드인프라관리  ·  14주차 2차시 [VM 전용]</a:t>
             </a:r>
@@ -5829,6 +5879,8 @@
                   <a:srgbClr val="5B6373"/>
                 </a:solidFill>
                 <a:latin typeface="맑은 고딕"/>
+                <a:ea typeface="맑은 고딕"/>
+                <a:cs typeface="맑은 고딕"/>
               </a:rPr>
               <a:t>12 / 13</a:t>
             </a:r>
@@ -6014,6 +6066,8 @@
                   <a:srgbClr val="FFFFFF"/>
                 </a:solidFill>
                 <a:latin typeface="맑은 고딕"/>
+                <a:ea typeface="맑은 고딕"/>
+                <a:cs typeface="맑은 고딕"/>
               </a:rPr>
               <a:t>오늘의 정리</a:t>
             </a:r>
@@ -6067,6 +6121,8 @@
                   <a:srgbClr val="14213D"/>
                 </a:solidFill>
                 <a:latin typeface="맑은 고딕"/>
+                <a:ea typeface="맑은 고딕"/>
+                <a:cs typeface="맑은 고딕"/>
               </a:rPr>
               <a:t>1</a:t>
             </a:r>
@@ -6102,6 +6158,8 @@
                   <a:srgbClr val="FFFFFF"/>
                 </a:solidFill>
                 <a:latin typeface="맑은 고딕"/>
+                <a:ea typeface="맑은 고딕"/>
+                <a:cs typeface="맑은 고딕"/>
               </a:rPr>
               <a:t>ab -n(요청 수) -c(동시성)로 실제 트래픽 폭주 상황을 흉내낼 수 있다</a:t>
             </a:r>
@@ -6155,6 +6213,8 @@
                   <a:srgbClr val="14213D"/>
                 </a:solidFill>
                 <a:latin typeface="맑은 고딕"/>
+                <a:ea typeface="맑은 고딕"/>
+                <a:cs typeface="맑은 고딕"/>
               </a:rPr>
               <a:t>2</a:t>
             </a:r>
@@ -6190,6 +6250,8 @@
                   <a:srgbClr val="FFFFFF"/>
                 </a:solidFill>
                 <a:latin typeface="맑은 고딕"/>
+                <a:ea typeface="맑은 고딕"/>
+                <a:cs typeface="맑은 고딕"/>
               </a:rPr>
               <a:t>요청당 연산이 거의 없는 앱은 CPU 사용률이 오르지 않으므로, 응답 로직에 실제 연산을 더해야 스케일업이 관찰된다</a:t>
             </a:r>
@@ -6331,6 +6393,8 @@
                   <a:srgbClr val="FFFFFF"/>
                 </a:solidFill>
                 <a:latin typeface="맑은 고딕"/>
+                <a:ea typeface="맑은 고딕"/>
+                <a:cs typeface="맑은 고딕"/>
               </a:rPr>
               <a:t>다음 차시 예고</a:t>
             </a:r>
@@ -6366,6 +6430,8 @@
                   <a:srgbClr val="14B8A6"/>
                 </a:solidFill>
                 <a:latin typeface="맑은 고딕"/>
+                <a:ea typeface="맑은 고딕"/>
+                <a:cs typeface="맑은 고딕"/>
               </a:rPr>
               <a:t>다음 차시 예고 — 14주차 3차시</a:t>
             </a:r>
@@ -6401,6 +6467,8 @@
                   <a:srgbClr val="FFFFFF"/>
                 </a:solidFill>
                 <a:latin typeface="맑은 고딕"/>
+                <a:ea typeface="맑은 고딕"/>
+                <a:cs typeface="맑은 고딕"/>
               </a:rPr>
               <a:t>이번엔 Pod를 강제로 죽여서 자가치유가 부하 상황에서도 정상 작동하는지 확인하고, 지금까지의 전체 여정을 함께 회고합니다.</a:t>
             </a:r>
@@ -6542,6 +6610,8 @@
                   <a:srgbClr val="14B8A6"/>
                 </a:solidFill>
                 <a:latin typeface="맑은 고딕"/>
+                <a:ea typeface="맑은 고딕"/>
+                <a:cs typeface="맑은 고딕"/>
               </a:rPr>
               <a:t>SESSION OVERVIEW</a:t>
             </a:r>
@@ -6577,6 +6647,8 @@
                   <a:srgbClr val="FFFFFF"/>
                 </a:solidFill>
                 <a:latin typeface="맑은 고딕"/>
+                <a:ea typeface="맑은 고딕"/>
+                <a:cs typeface="맑은 고딕"/>
               </a:rPr>
               <a:t>오늘의 학습 목표</a:t>
             </a:r>
@@ -6616,6 +6688,8 @@
                   <a:srgbClr val="222733"/>
                 </a:solidFill>
                 <a:latin typeface="맑은 고딕"/>
+                <a:ea typeface="맑은 고딕"/>
+                <a:cs typeface="맑은 고딕"/>
               </a:rPr>
               <a:t>1.  ApacheBench(ab)로 부하 테스트를 실행하는 방법을 이해한다</a:t>
             </a:r>
@@ -6632,6 +6706,8 @@
                   <a:srgbClr val="222733"/>
                 </a:solidFill>
                 <a:latin typeface="맑은 고딕"/>
+                <a:ea typeface="맑은 고딕"/>
+                <a:cs typeface="맑은 고딕"/>
               </a:rPr>
               <a:t>2.  요청당 연산이 거의 없는 앱은 왜 스케일업이 관찰되지 않는지 이해한다</a:t>
             </a:r>
@@ -6648,6 +6724,8 @@
                   <a:srgbClr val="222733"/>
                 </a:solidFill>
                 <a:latin typeface="맑은 고딕"/>
+                <a:ea typeface="맑은 고딕"/>
+                <a:cs typeface="맑은 고딕"/>
               </a:rPr>
               <a:t>3.  실제로 트래픽을 흘려보내 chatbot Pod가 1개에서 여러 개로 늘어나는 것을 관찰한다</a:t>
             </a:r>
@@ -6683,6 +6761,8 @@
                   <a:srgbClr val="5B6373"/>
                 </a:solidFill>
                 <a:latin typeface="맑은 고딕"/>
+                <a:ea typeface="맑은 고딕"/>
+                <a:cs typeface="맑은 고딕"/>
               </a:rPr>
               <a:t>클라우드인프라관리  ·  14주차 2차시 [VM 전용]</a:t>
             </a:r>
@@ -6718,6 +6798,8 @@
                   <a:srgbClr val="5B6373"/>
                 </a:solidFill>
                 <a:latin typeface="맑은 고딕"/>
+                <a:ea typeface="맑은 고딕"/>
+                <a:cs typeface="맑은 고딕"/>
               </a:rPr>
               <a:t>02 / 13</a:t>
             </a:r>
@@ -6903,6 +6985,8 @@
                   <a:srgbClr val="14B8A6"/>
                 </a:solidFill>
                 <a:latin typeface="맑은 고딕"/>
+                <a:ea typeface="맑은 고딕"/>
+                <a:cs typeface="맑은 고딕"/>
               </a:rPr>
               <a:t>SESSION OVERVIEW</a:t>
             </a:r>
@@ -6938,6 +7022,8 @@
                   <a:srgbClr val="FFFFFF"/>
                 </a:solidFill>
                 <a:latin typeface="맑은 고딕"/>
+                <a:ea typeface="맑은 고딕"/>
+                <a:cs typeface="맑은 고딕"/>
               </a:rPr>
               <a:t>오늘의 진행 순서 (Killercoda 없음)</a:t>
             </a:r>
@@ -7105,6 +7191,8 @@
                   <a:srgbClr val="FFFFFF"/>
                 </a:solidFill>
                 <a:latin typeface="맑은 고딕"/>
+                <a:ea typeface="맑은 고딕"/>
+                <a:cs typeface="맑은 고딕"/>
               </a:rPr>
               <a:t>1</a:t>
             </a:r>
@@ -7188,6 +7276,8 @@
                   <a:srgbClr val="14213D"/>
                 </a:solidFill>
                 <a:latin typeface="맑은 고딕"/>
+                <a:ea typeface="맑은 고딕"/>
+                <a:cs typeface="맑은 고딕"/>
               </a:rPr>
               <a:t>개념 설명</a:t>
             </a:r>
@@ -7227,6 +7317,8 @@
                   <a:srgbClr val="222733"/>
                 </a:solidFill>
                 <a:latin typeface="맑은 고딕"/>
+                <a:ea typeface="맑은 고딕"/>
+                <a:cs typeface="맑은 고딕"/>
               </a:rPr>
               <a:t>ab 사용법+검증된 함정</a:t>
             </a:r>
@@ -7306,6 +7398,8 @@
                   <a:srgbClr val="FFFFFF"/>
                 </a:solidFill>
                 <a:latin typeface="맑은 고딕"/>
+                <a:ea typeface="맑은 고딕"/>
+                <a:cs typeface="맑은 고딕"/>
               </a:rPr>
               <a:t>2</a:t>
             </a:r>
@@ -7389,6 +7483,8 @@
                   <a:srgbClr val="14213D"/>
                 </a:solidFill>
                 <a:latin typeface="맑은 고딕"/>
+                <a:ea typeface="맑은 고딕"/>
+                <a:cs typeface="맑은 고딕"/>
               </a:rPr>
               <a:t>VM 실습</a:t>
             </a:r>
@@ -7428,6 +7524,8 @@
                   <a:srgbClr val="222733"/>
                 </a:solidFill>
                 <a:latin typeface="맑은 고딕"/>
+                <a:ea typeface="맑은 고딕"/>
+                <a:cs typeface="맑은 고딕"/>
               </a:rPr>
               <a:t>부하 테스트+스케일업 관찰</a:t>
             </a:r>
@@ -7507,6 +7605,8 @@
                   <a:srgbClr val="FFFFFF"/>
                 </a:solidFill>
                 <a:latin typeface="맑은 고딕"/>
+                <a:ea typeface="맑은 고딕"/>
+                <a:cs typeface="맑은 고딕"/>
               </a:rPr>
               <a:t>3</a:t>
             </a:r>
@@ -7590,6 +7690,8 @@
                   <a:srgbClr val="14213D"/>
                 </a:solidFill>
                 <a:latin typeface="맑은 고딕"/>
+                <a:ea typeface="맑은 고딕"/>
+                <a:cs typeface="맑은 고딕"/>
               </a:rPr>
               <a:t>결과 정리</a:t>
             </a:r>
@@ -7629,6 +7731,8 @@
                   <a:srgbClr val="222733"/>
                 </a:solidFill>
                 <a:latin typeface="맑은 고딕"/>
+                <a:ea typeface="맑은 고딕"/>
+                <a:cs typeface="맑은 고딕"/>
               </a:rPr>
               <a:t>제출 안내</a:t>
             </a:r>
@@ -7664,6 +7768,8 @@
                   <a:srgbClr val="5B6373"/>
                 </a:solidFill>
                 <a:latin typeface="맑은 고딕"/>
+                <a:ea typeface="맑은 고딕"/>
+                <a:cs typeface="맑은 고딕"/>
               </a:rPr>
               <a:t>클라우드인프라관리  ·  14주차 2차시 [VM 전용]</a:t>
             </a:r>
@@ -7699,6 +7805,8 @@
                   <a:srgbClr val="5B6373"/>
                 </a:solidFill>
                 <a:latin typeface="맑은 고딕"/>
+                <a:ea typeface="맑은 고딕"/>
+                <a:cs typeface="맑은 고딕"/>
               </a:rPr>
               <a:t>03 / 13</a:t>
             </a:r>
@@ -7902,6 +8010,8 @@
                   <a:srgbClr val="14213D"/>
                 </a:solidFill>
                 <a:latin typeface="맑은 고딕"/>
+                <a:ea typeface="맑은 고딕"/>
+                <a:cs typeface="맑은 고딕"/>
               </a:rPr>
               <a:t>PART 01</a:t>
             </a:r>
@@ -7937,6 +8047,8 @@
                   <a:srgbClr val="FFFFFF"/>
                 </a:solidFill>
                 <a:latin typeface="맑은 고딕"/>
+                <a:ea typeface="맑은 고딕"/>
+                <a:cs typeface="맑은 고딕"/>
               </a:rPr>
               <a:t>ApacheBench란?</a:t>
             </a:r>
@@ -7972,6 +8084,8 @@
                   <a:srgbClr val="C9D3E6"/>
                 </a:solidFill>
                 <a:latin typeface="맑은 고딕"/>
+                <a:ea typeface="맑은 고딕"/>
+                <a:cs typeface="맑은 고딕"/>
               </a:rPr>
               <a:t>터미널로 부하를 흉내내는 도구</a:t>
             </a:r>
@@ -8131,6 +8245,8 @@
                   <a:srgbClr val="14213D"/>
                 </a:solidFill>
                 <a:latin typeface="맑은 고딕"/>
+                <a:ea typeface="맑은 고딕"/>
+                <a:cs typeface="맑은 고딕"/>
               </a:rPr>
               <a:t>01</a:t>
             </a:r>
@@ -8166,6 +8282,8 @@
                   <a:srgbClr val="14B8A6"/>
                 </a:solidFill>
                 <a:latin typeface="맑은 고딕"/>
+                <a:ea typeface="맑은 고딕"/>
+                <a:cs typeface="맑은 고딕"/>
               </a:rPr>
               <a:t>PART 1 · ApacheBench</a:t>
             </a:r>
@@ -8201,6 +8319,8 @@
                   <a:srgbClr val="FFFFFF"/>
                 </a:solidFill>
                 <a:latin typeface="맑은 고딕"/>
+                <a:ea typeface="맑은 고딕"/>
+                <a:cs typeface="맑은 고딕"/>
               </a:rPr>
               <a:t>ab 명령어 기본 문법</a:t>
             </a:r>
@@ -8240,6 +8360,8 @@
                   <a:srgbClr val="0D9488"/>
                 </a:solidFill>
                 <a:latin typeface="맑은 고딕"/>
+                <a:ea typeface="맑은 고딕"/>
+                <a:cs typeface="맑은 고딕"/>
               </a:rPr>
               <a:t>●  </a:t>
             </a:r>
@@ -8249,6 +8371,8 @@
                   <a:srgbClr val="222733"/>
                 </a:solidFill>
                 <a:latin typeface="맑은 고딕"/>
+                <a:ea typeface="맑은 고딕"/>
+                <a:cs typeface="맑은 고딕"/>
               </a:rPr>
               <a:t>ab -n 10000 -c 100 http://{chatbot-url}/</a:t>
             </a:r>
@@ -8265,6 +8389,8 @@
                   <a:srgbClr val="0D9488"/>
                 </a:solidFill>
                 <a:latin typeface="맑은 고딕"/>
+                <a:ea typeface="맑은 고딕"/>
+                <a:cs typeface="맑은 고딕"/>
               </a:rPr>
               <a:t>●  </a:t>
             </a:r>
@@ -8274,6 +8400,8 @@
                   <a:srgbClr val="222733"/>
                 </a:solidFill>
                 <a:latin typeface="맑은 고딕"/>
+                <a:ea typeface="맑은 고딕"/>
+                <a:cs typeface="맑은 고딕"/>
               </a:rPr>
               <a:t>-n 10000 — 총 몇 번 요청을 보낼지(요청 총량)</a:t>
             </a:r>
@@ -8290,6 +8418,8 @@
                   <a:srgbClr val="0D9488"/>
                 </a:solidFill>
                 <a:latin typeface="맑은 고딕"/>
+                <a:ea typeface="맑은 고딕"/>
+                <a:cs typeface="맑은 고딕"/>
               </a:rPr>
               <a:t>●  </a:t>
             </a:r>
@@ -8299,6 +8429,8 @@
                   <a:srgbClr val="222733"/>
                 </a:solidFill>
                 <a:latin typeface="맑은 고딕"/>
+                <a:ea typeface="맑은 고딕"/>
+                <a:cs typeface="맑은 고딕"/>
               </a:rPr>
               <a:t>-c 100 — 동시에 몇 개의 연결로 요청을 보낼지(동시성)</a:t>
             </a:r>
@@ -8315,6 +8447,8 @@
                   <a:srgbClr val="0D9488"/>
                 </a:solidFill>
                 <a:latin typeface="맑은 고딕"/>
+                <a:ea typeface="맑은 고딕"/>
+                <a:cs typeface="맑은 고딕"/>
               </a:rPr>
               <a:t>●  </a:t>
             </a:r>
@@ -8324,6 +8458,8 @@
                   <a:srgbClr val="222733"/>
                 </a:solidFill>
                 <a:latin typeface="맑은 고딕"/>
+                <a:ea typeface="맑은 고딕"/>
+                <a:cs typeface="맑은 고딕"/>
               </a:rPr>
               <a:t>실행하면 초당 처리 요청 수, 응답 시간 등 통계가 출력됨</a:t>
             </a:r>
@@ -8359,6 +8495,8 @@
                   <a:srgbClr val="5B6373"/>
                 </a:solidFill>
                 <a:latin typeface="맑은 고딕"/>
+                <a:ea typeface="맑은 고딕"/>
+                <a:cs typeface="맑은 고딕"/>
               </a:rPr>
               <a:t>클라우드인프라관리  ·  14주차 2차시 [VM 전용]</a:t>
             </a:r>
@@ -8394,6 +8532,8 @@
                   <a:srgbClr val="5B6373"/>
                 </a:solidFill>
                 <a:latin typeface="맑은 고딕"/>
+                <a:ea typeface="맑은 고딕"/>
+                <a:cs typeface="맑은 고딕"/>
               </a:rPr>
               <a:t>05 / 13</a:t>
             </a:r>
@@ -8597,6 +8737,8 @@
                   <a:srgbClr val="14213D"/>
                 </a:solidFill>
                 <a:latin typeface="맑은 고딕"/>
+                <a:ea typeface="맑은 고딕"/>
+                <a:cs typeface="맑은 고딕"/>
               </a:rPr>
               <a:t>PART 02</a:t>
             </a:r>
@@ -8632,6 +8774,8 @@
                   <a:srgbClr val="FFFFFF"/>
                 </a:solidFill>
                 <a:latin typeface="맑은 고딕"/>
+                <a:ea typeface="맑은 고딕"/>
+                <a:cs typeface="맑은 고딕"/>
               </a:rPr>
               <a:t>검증된 함정 — CPU가 안 오른다면?</a:t>
             </a:r>
@@ -8667,6 +8811,8 @@
                   <a:srgbClr val="C9D3E6"/>
                 </a:solidFill>
                 <a:latin typeface="맑은 고딕"/>
+                <a:ea typeface="맑은 고딕"/>
+                <a:cs typeface="맑은 고딕"/>
               </a:rPr>
               <a:t>1차시에서 예고했던 그 이유</a:t>
             </a:r>
@@ -8826,6 +8972,8 @@
                   <a:srgbClr val="14213D"/>
                 </a:solidFill>
                 <a:latin typeface="맑은 고딕"/>
+                <a:ea typeface="맑은 고딕"/>
+                <a:cs typeface="맑은 고딕"/>
               </a:rPr>
               <a:t>02</a:t>
             </a:r>
@@ -8861,6 +9009,8 @@
                   <a:srgbClr val="14B8A6"/>
                 </a:solidFill>
                 <a:latin typeface="맑은 고딕"/>
+                <a:ea typeface="맑은 고딕"/>
+                <a:cs typeface="맑은 고딕"/>
               </a:rPr>
               <a:t>PART 2 · 검증된 함정</a:t>
             </a:r>
@@ -8896,6 +9046,8 @@
                   <a:srgbClr val="FFFFFF"/>
                 </a:solidFill>
                 <a:latin typeface="맑은 고딕"/>
+                <a:ea typeface="맑은 고딕"/>
+                <a:cs typeface="맑은 고딕"/>
               </a:rPr>
               <a:t>부하를 줘도 CPU가 0%에 머무는 이유</a:t>
             </a:r>
@@ -8935,6 +9087,8 @@
                   <a:srgbClr val="0D9488"/>
                 </a:solidFill>
                 <a:latin typeface="맑은 고딕"/>
+                <a:ea typeface="맑은 고딕"/>
+                <a:cs typeface="맑은 고딕"/>
               </a:rPr>
               <a:t>●  </a:t>
             </a:r>
@@ -8944,6 +9098,8 @@
                   <a:srgbClr val="222733"/>
                 </a:solidFill>
                 <a:latin typeface="맑은 고딕"/>
+                <a:ea typeface="맑은 고딕"/>
+                <a:cs typeface="맑은 고딕"/>
               </a:rPr>
               <a:t>챗봇 앱이 요청당 실제 연산이 거의 없으면(단순 문자열 반환 등), ab로 아무리 부하를 줘도 CPU 사용률이 오르지 않음</a:t>
             </a:r>
@@ -8960,6 +9116,8 @@
                   <a:srgbClr val="0D9488"/>
                 </a:solidFill>
                 <a:latin typeface="맑은 고딕"/>
+                <a:ea typeface="맑은 고딕"/>
+                <a:cs typeface="맑은 고딕"/>
               </a:rPr>
               <a:t>●  </a:t>
             </a:r>
@@ -8969,6 +9127,8 @@
                   <a:srgbClr val="222733"/>
                 </a:solidFill>
                 <a:latin typeface="맑은 고딕"/>
+                <a:ea typeface="맑은 고딕"/>
+                <a:cs typeface="맑은 고딕"/>
               </a:rPr>
               <a:t>2 vCPU VM에서는 ab 프로세스 자체가 오히려 더 큰 부담이 되기도 함</a:t>
             </a:r>
@@ -8985,6 +9145,8 @@
                   <a:srgbClr val="0D9488"/>
                 </a:solidFill>
                 <a:latin typeface="맑은 고딕"/>
+                <a:ea typeface="맑은 고딕"/>
+                <a:cs typeface="맑은 고딕"/>
               </a:rPr>
               <a:t>●  </a:t>
             </a:r>
@@ -8994,6 +9156,8 @@
                   <a:srgbClr val="222733"/>
                 </a:solidFill>
                 <a:latin typeface="맑은 고딕"/>
+                <a:ea typeface="맑은 고딕"/>
+                <a:cs typeface="맑은 고딕"/>
               </a:rPr>
               <a:t>1차시에 설정한 resource request(낮게)만으로는 부족할 수 있음</a:t>
             </a:r>
@@ -9073,6 +9237,8 @@
                   <a:srgbClr val="FFFFFF"/>
                 </a:solidFill>
                 <a:latin typeface="맑은 고딕"/>
+                <a:ea typeface="맑은 고딕"/>
+                <a:cs typeface="맑은 고딕"/>
               </a:rPr>
               <a:t>✅  함께 적용해야 하는 두 가지</a:t>
             </a:r>
@@ -9108,6 +9274,8 @@
                   <a:srgbClr val="FFFFFF"/>
                 </a:solidFill>
                 <a:latin typeface="맑은 고딕"/>
+                <a:ea typeface="맑은 고딕"/>
+                <a:cs typeface="맑은 고딕"/>
               </a:rPr>
               <a:t>① resource request를 낮게(완료) ② 챗봇 응답 로직에 약간의 연산 추가</a:t>
             </a:r>
@@ -9143,6 +9311,8 @@
                   <a:srgbClr val="5B6373"/>
                 </a:solidFill>
                 <a:latin typeface="맑은 고딕"/>
+                <a:ea typeface="맑은 고딕"/>
+                <a:cs typeface="맑은 고딕"/>
               </a:rPr>
               <a:t>클라우드인프라관리  ·  14주차 2차시 [VM 전용]</a:t>
             </a:r>
@@ -9178,6 +9348,8 @@
                   <a:srgbClr val="5B6373"/>
                 </a:solidFill>
                 <a:latin typeface="맑은 고딕"/>
+                <a:ea typeface="맑은 고딕"/>
+                <a:cs typeface="맑은 고딕"/>
               </a:rPr>
               <a:t>07 / 13</a:t>
             </a:r>
@@ -9381,6 +9553,8 @@
                   <a:srgbClr val="14213D"/>
                 </a:solidFill>
                 <a:latin typeface="맑은 고딕"/>
+                <a:ea typeface="맑은 고딕"/>
+                <a:cs typeface="맑은 고딕"/>
               </a:rPr>
               <a:t>02</a:t>
             </a:r>
@@ -9416,6 +9590,8 @@
                   <a:srgbClr val="14B8A6"/>
                 </a:solidFill>
                 <a:latin typeface="맑은 고딕"/>
+                <a:ea typeface="맑은 고딕"/>
+                <a:cs typeface="맑은 고딕"/>
               </a:rPr>
               <a:t>PART 2 · 검증된 함정</a:t>
             </a:r>
@@ -9451,6 +9627,8 @@
                   <a:srgbClr val="FFFFFF"/>
                 </a:solidFill>
                 <a:latin typeface="맑은 고딕"/>
+                <a:ea typeface="맑은 고딕"/>
+                <a:cs typeface="맑은 고딕"/>
               </a:rPr>
               <a:t>챗봇 응답 로직에 연산 추가하기</a:t>
             </a:r>
@@ -9490,6 +9668,8 @@
                   <a:srgbClr val="0D9488"/>
                 </a:solidFill>
                 <a:latin typeface="맑은 고딕"/>
+                <a:ea typeface="맑은 고딕"/>
+                <a:cs typeface="맑은 고딕"/>
               </a:rPr>
               <a:t>●  </a:t>
             </a:r>
@@ -9499,6 +9679,8 @@
                   <a:srgbClr val="222733"/>
                 </a:solidFill>
                 <a:latin typeface="맑은 고딕"/>
+                <a:ea typeface="맑은 고딕"/>
+                <a:cs typeface="맑은 고딕"/>
               </a:rPr>
               <a:t>app.py의 응답 함수 안에 문자열 처리를 반복하는 코드를 몇 줄 추가(예: 특정 연산을 N회 반복)</a:t>
             </a:r>
@@ -9515,6 +9697,8 @@
                   <a:srgbClr val="0D9488"/>
                 </a:solidFill>
                 <a:latin typeface="맑은 고딕"/>
+                <a:ea typeface="맑은 고딕"/>
+                <a:cs typeface="맑은 고딕"/>
               </a:rPr>
               <a:t>●  </a:t>
             </a:r>
@@ -9524,6 +9708,8 @@
                   <a:srgbClr val="222733"/>
                 </a:solidFill>
                 <a:latin typeface="맑은 고딕"/>
+                <a:ea typeface="맑은 고딕"/>
+                <a:cs typeface="맑은 고딕"/>
               </a:rPr>
               <a:t>이렇게 하면 요청 하나당 실제로 CPU를 사용하는 시간이 생겨, 부하가 몰릴 때 사용률이 눈에 띄게 오름</a:t>
             </a:r>
@@ -9540,6 +9726,8 @@
                   <a:srgbClr val="0D9488"/>
                 </a:solidFill>
                 <a:latin typeface="맑은 고딕"/>
+                <a:ea typeface="맑은 고딕"/>
+                <a:cs typeface="맑은 고딕"/>
               </a:rPr>
               <a:t>●  </a:t>
             </a:r>
@@ -9549,6 +9737,8 @@
                   <a:srgbClr val="222733"/>
                 </a:solidFill>
                 <a:latin typeface="맑은 고딕"/>
+                <a:ea typeface="맑은 고딕"/>
+                <a:cs typeface="맑은 고딕"/>
               </a:rPr>
               <a:t>코드 수정 후 12~13주차에 배운 파이프라인으로 다시 배포(git push만 하면 자동 반영)</a:t>
             </a:r>
@@ -9584,6 +9774,8 @@
                   <a:srgbClr val="5B6373"/>
                 </a:solidFill>
                 <a:latin typeface="맑은 고딕"/>
+                <a:ea typeface="맑은 고딕"/>
+                <a:cs typeface="맑은 고딕"/>
               </a:rPr>
               <a:t>클라우드인프라관리  ·  14주차 2차시 [VM 전용]</a:t>
             </a:r>
@@ -9619,6 +9811,8 @@
                   <a:srgbClr val="5B6373"/>
                 </a:solidFill>
                 <a:latin typeface="맑은 고딕"/>
+                <a:ea typeface="맑은 고딕"/>
+                <a:cs typeface="맑은 고딕"/>
               </a:rPr>
               <a:t>08 / 13</a:t>
             </a:r>
@@ -9822,6 +10016,8 @@
                   <a:srgbClr val="14213D"/>
                 </a:solidFill>
                 <a:latin typeface="맑은 고딕"/>
+                <a:ea typeface="맑은 고딕"/>
+                <a:cs typeface="맑은 고딕"/>
               </a:rPr>
               <a:t>03</a:t>
             </a:r>
@@ -9857,6 +10053,8 @@
                   <a:srgbClr val="14B8A6"/>
                 </a:solidFill>
                 <a:latin typeface="맑은 고딕"/>
+                <a:ea typeface="맑은 고딕"/>
+                <a:cs typeface="맑은 고딕"/>
               </a:rPr>
               <a:t>실습 안내</a:t>
             </a:r>
@@ -9892,6 +10090,8 @@
                   <a:srgbClr val="FFFFFF"/>
                 </a:solidFill>
                 <a:latin typeface="맑은 고딕"/>
+                <a:ea typeface="맑은 고딕"/>
+                <a:cs typeface="맑은 고딕"/>
               </a:rPr>
               <a:t>VM 실습 — 부하 테스트 준비</a:t>
             </a:r>
@@ -9931,6 +10131,8 @@
                   <a:srgbClr val="0D9488"/>
                 </a:solidFill>
                 <a:latin typeface="맑은 고딕"/>
+                <a:ea typeface="맑은 고딕"/>
+                <a:cs typeface="맑은 고딕"/>
               </a:rPr>
               <a:t>●  </a:t>
             </a:r>
@@ -9940,6 +10142,8 @@
                   <a:srgbClr val="222733"/>
                 </a:solidFill>
                 <a:latin typeface="맑은 고딕"/>
+                <a:ea typeface="맑은 고딕"/>
+                <a:cs typeface="맑은 고딕"/>
               </a:rPr>
               <a:t>app.py에 연산 추가 → git push → 파이프라인 자동 배포로 새 버전 반영 확인</a:t>
             </a:r>
@@ -9956,6 +10160,8 @@
                   <a:srgbClr val="0D9488"/>
                 </a:solidFill>
                 <a:latin typeface="맑은 고딕"/>
+                <a:ea typeface="맑은 고딕"/>
+                <a:cs typeface="맑은 고딕"/>
               </a:rPr>
               <a:t>●  </a:t>
             </a:r>
@@ -9965,6 +10171,8 @@
                   <a:srgbClr val="222733"/>
                 </a:solidFill>
                 <a:latin typeface="맑은 고딕"/>
+                <a:ea typeface="맑은 고딕"/>
+                <a:cs typeface="맑은 고딕"/>
               </a:rPr>
               <a:t>다른 터미널 창에 kubectl get pods -w 와 kubectl get hpa -w 를 각각 띄워 실시간 관찰 준비</a:t>
             </a:r>
@@ -9981,6 +10189,8 @@
                   <a:srgbClr val="0D9488"/>
                 </a:solidFill>
                 <a:latin typeface="맑은 고딕"/>
+                <a:ea typeface="맑은 고딕"/>
+                <a:cs typeface="맑은 고딕"/>
               </a:rPr>
               <a:t>●  </a:t>
             </a:r>
@@ -9990,6 +10200,8 @@
                   <a:srgbClr val="222733"/>
                 </a:solidFill>
                 <a:latin typeface="맑은 고딕"/>
+                <a:ea typeface="맑은 고딕"/>
+                <a:cs typeface="맑은 고딕"/>
               </a:rPr>
               <a:t>ab -n 10000 -c 100 http://$(minikube service chatbot --url)/ 실행</a:t>
             </a:r>
@@ -10025,6 +10237,8 @@
                   <a:srgbClr val="5B6373"/>
                 </a:solidFill>
                 <a:latin typeface="맑은 고딕"/>
+                <a:ea typeface="맑은 고딕"/>
+                <a:cs typeface="맑은 고딕"/>
               </a:rPr>
               <a:t>클라우드인프라관리  ·  14주차 2차시 [VM 전용]</a:t>
             </a:r>
@@ -10060,6 +10274,8 @@
                   <a:srgbClr val="5B6373"/>
                 </a:solidFill>
                 <a:latin typeface="맑은 고딕"/>
+                <a:ea typeface="맑은 고딕"/>
+                <a:cs typeface="맑은 고딕"/>
               </a:rPr>
               <a:t>10 / 13</a:t>
             </a:r>
